--- a/public/materialy/1L/6/Prezentace k hodinám/6. Zvuk a video.pptx
+++ b/public/materialy/1L/6/Prezentace k hodinám/6. Zvuk a video.pptx
@@ -513,7 +513,7 @@
           </a:p>
           <a:p>
             <a:r>
-              <a:t>Soubory: 01. Laboratoř grafiky.html (modul 05), media/, 04. Parametry médií.csv, 07. Zvuk a video.txt</a:t>
+              <a:t>Soubory: 01. Laboratoř grafiky.html (modul 05), Média/, 04. Parametry médií.csv, 07. Zvuk a video.txt</a:t>
             </a:r>
           </a:p>
           <a:p>
@@ -758,7 +758,7 @@
           </a:p>
           <a:p>
             <a:r>
-              <a:t>Soubory: 01. Laboratoř grafiky.html (modul 05), media/, 04. Parametry médií.csv, 07. Zvuk a video.txt</a:t>
+              <a:t>Soubory: 01. Laboratoř grafiky.html (modul 05), Média/, 04. Parametry médií.csv, 07. Zvuk a video.txt</a:t>
             </a:r>
           </a:p>
           <a:p>
@@ -6036,7 +6036,7 @@
                 </a:solidFill>
                 <a:latin typeface="Calibri"/>
               </a:rPr>
-              <a:t>01. Laboratoř grafiky.html (modul 05), media/, 04. Parametry médií.csv, 07. Zvuk a video.txt</a:t>
+              <a:t>01. Laboratoř grafiky.html (modul 05), Média/, 04. Parametry médií.csv, 07. Zvuk a video.txt</a:t>
             </a:r>
           </a:p>
         </p:txBody>
@@ -6254,7 +6254,7 @@
                 </a:solidFill>
                 <a:latin typeface="Calibri"/>
               </a:rPr>
-              <a:t>Porovnej čtyři zvuky a čtyři videa ve složce media.</a:t>
+              <a:t>Porovnej čtyři zvuky a čtyři videa ve složce Média.</a:t>
             </a:r>
           </a:p>
         </p:txBody>

--- a/public/materialy/1L/6/Prezentace k hodinám/6. Zvuk a video.pptx
+++ b/public/materialy/1L/6/Prezentace k hodinám/6. Zvuk a video.pptx
@@ -508,17 +508,55 @@
           <a:lstStyle/>
           <a:p>
             <a:r>
-              <a:t>Cíl hodiny: Student vysvětlí vzorkování zvuku, vliv rozlišení a snímkové frekvence u videa a rozliší kontejner od kodeku.</a:t>
-            </a:r>
-          </a:p>
-          <a:p>
-            <a:r>
-              <a:t>Soubory: Laboratoř – vzorkování zvuku.html, Média/, Parametry médií.csv, Zvuk a video.txt</a:t>
-            </a:r>
-          </a:p>
-          <a:p>
-            <a:r>
-              <a:t>Výstup: Vyplněné Parametry médií.csv a odpovědi na části A, B a C souboru 06.</a:t>
+              <a:t>NEŽ ZAZVONÍ</a:t>
+            </a:r>
+          </a:p>
+          <a:p>
+            <a:r>
+              <a:t>SEŽEŇ SLUCHÁTKA. Bez nich se tahle hodina odučit nedá — rozdíl mezi vzorkovacími frekvencemi ve třídě nikdo neuslyší a devět počítačů hrajících naráz to nespraví.</a:t>
+            </a:r>
+          </a:p>
+          <a:p>
+            <a:r>
+              <a:t>Otevři Laboratoř – vzorkování zvuku.html na projektoru, rozbal Média.zip a rozdej Parametry médií.csv a Zvuk a video.txt.</a:t>
+            </a:r>
+          </a:p>
+          <a:p>
+            <a:r>
+              <a:t>Ověř, že se .wav a .mp4 na stanicích přehrají. Vše běží offline, nic se nestahuje.</a:t>
+            </a:r>
+          </a:p>
+          <a:p/>
+          <a:p>
+            <a:r>
+              <a:t>CÍL HODINY</a:t>
+            </a:r>
+          </a:p>
+          <a:p>
+            <a:r>
+              <a:t>Student vysvětlí vzorkování zvuku, vliv rozlišení a snímkové frekvence u videa a rozliší kontejner od kodeku.</a:t>
+            </a:r>
+          </a:p>
+          <a:p/>
+          <a:p>
+            <a:r>
+              <a:t>VÝSTUP, KTERÝ VYBÍRÁŠ</a:t>
+            </a:r>
+          </a:p>
+          <a:p>
+            <a:r>
+              <a:t>Vyplněné Parametry médií.csv a odpovědi na části A, B a C pracovního listu.</a:t>
+            </a:r>
+          </a:p>
+          <a:p/>
+          <a:p>
+            <a:r>
+              <a:t>ROZVRŽENÍ</a:t>
+            </a:r>
+          </a:p>
+          <a:p>
+            <a:r>
+              <a:t>5 min návrh · 7 min výklad · 28 min práce · 5 min rozbor a exit ticket.</a:t>
             </a:r>
           </a:p>
         </p:txBody>
@@ -591,14 +629,42 @@
               <a:t>Čas: 0–5 minut.</a:t>
             </a:r>
           </a:p>
-          <a:p>
-            <a:r>
-              <a:t>Otázka pro studenty: Zvuk je plynulá vlna. Jak ho počítač uloží, když umí pracovat jen s čísly?</a:t>
-            </a:r>
-          </a:p>
-          <a:p>
-            <a:r>
-              <a:t>Postup: nech studenty rozhodnout a zapsat důvod dřív, než ukážeš řešení. Neprozrazuj správnou odpověď.</a:t>
+          <a:p/>
+          <a:p>
+            <a:r>
+              <a:t>CO ŘEKNEŠ</a:t>
+            </a:r>
+          </a:p>
+          <a:p>
+            <a:r>
+              <a:t>„Zvuk je vlna. Plynulá, spojitá, bez skoků. Počítač umí jen čísla. Navrhněte, jak z té vlny udělat čísla — jednou větou, vlastní postup, ne co jste někde slyšeli.“</a:t>
+            </a:r>
+          </a:p>
+          <a:p/>
+          <a:p>
+            <a:r>
+              <a:t>CO DĚLÁŠ</a:t>
+            </a:r>
+          </a:p>
+          <a:p>
+            <a:r>
+              <a:t>Nakresli na tabuli jednu vlnu a nech ji tam. Za deset minut do ní budeš kreslit svislé čárky a bude to celý výklad vzorkování.</a:t>
+            </a:r>
+          </a:p>
+          <a:p>
+            <a:r>
+              <a:t>Ptej se konkrétně: „Kdo napsal, že se to měří v pravidelných intervalech?“ Ten student právě vymyslel vzorkování a řekni mu to.</a:t>
+            </a:r>
+          </a:p>
+          <a:p/>
+          <a:p>
+            <a:r>
+              <a:t>POZOR</a:t>
+            </a:r>
+          </a:p>
+          <a:p>
+            <a:r>
+              <a:t>Neopravuj nápady, které nevedou nikam. Odpověď „uloží se to jako obrázek té vlny“ je zajímavá a stojí za dvacet vteřin: obrázek vlny by šel, jen by byl obrovský a nešel by přehrát.</a:t>
             </a:r>
           </a:p>
         </p:txBody>
@@ -668,22 +734,60 @@
           <a:lstStyle/>
           <a:p>
             <a:r>
-              <a:t>Čas: 5–12 minut.</a:t>
-            </a:r>
-          </a:p>
-          <a:p>
-            <a:r>
-              <a:t>Klíčové pojmy: Vzorkování · Snímková frekvence · Kontejner a kodek</a:t>
-            </a:r>
-          </a:p>
-          <a:p>
-            <a:r>
-              <a:t>Digitální záznam je vždy jen dostatečně hustý vzorek skutečnosti.</a:t>
-            </a:r>
-          </a:p>
-          <a:p>
-            <a:r>
-              <a:t>Postup: vysvětli stručně, ověř porozuměním otázkou, nepřednášej déle než 7 minut.</a:t>
+              <a:t>Čas: 5–12 minut. Kresli přitom do vlny na tabuli.</a:t>
+            </a:r>
+          </a:p>
+          <a:p/>
+          <a:p>
+            <a:r>
+              <a:t>CO ŘEKNEŠ</a:t>
+            </a:r>
+          </a:p>
+          <a:p>
+            <a:r>
+              <a:t>K bodu 01: „Vzorkování je měření hlasitosti mnohokrát za sekundu.“ Dělej přitom svislé čárky do vlny na tabuli. „CD měří čtyřicet čtyři tisíc jednou stovkou za sekundu. Když těch čárek uděláte míň, mezi nimi se vlna dopočítá a to, co se do mezery nevešlo, je pryč — a jsou to vysoké tóny.“</a:t>
+            </a:r>
+          </a:p>
+          <a:p>
+            <a:r>
+              <a:t>„Druhý údaj je, jak přesně tu výšku změříte. Šestnáct bitů dá pětašedesát tisíc úrovní, osm bitů jen dvě stě padesát šest. Málo úrovní slyšíte jako šum.“</a:t>
+            </a:r>
+          </a:p>
+          <a:p>
+            <a:r>
+              <a:t>K bodu 02: „U videa je to podobné, jen se místo hlasitosti měří celý obraz. Snímková frekvence je počet obrázků za sekundu a rozhoduje hlavně o plynulosti pohybu.“</a:t>
+            </a:r>
+          </a:p>
+          <a:p>
+            <a:r>
+              <a:t>K bodu 03: „A poslední dvojice, kterou si lidi pletou celý život. MP4 je krabice. H.264 je způsob, jakým jsou věci uvnitř složené. Když soubor nejde přehrát, skoro nikdy za to nemůže krabice — chybí návod, jak rozbalit obsah.“</a:t>
+            </a:r>
+          </a:p>
+          <a:p>
+            <a:r>
+              <a:t>Závěr: „Digitální záznam je vždycky jen dostatečně hustý vzorek skutečnosti. Nikdy ta skutečnost sama.“</a:t>
+            </a:r>
+          </a:p>
+          <a:p/>
+          <a:p>
+            <a:r>
+              <a:t>CO DĚLÁŠ</a:t>
+            </a:r>
+          </a:p>
+          <a:p>
+            <a:r>
+              <a:t>Ověř porozumění: „Ke stažení je stejný film jako .mp4 a jako .mkv. Jde poznat, který půjde přehrát?“ Správně ne, rozhoduje kodek uvnitř.</a:t>
+            </a:r>
+          </a:p>
+          <a:p/>
+          <a:p>
+            <a:r>
+              <a:t>POZOR</a:t>
+            </a:r>
+          </a:p>
+          <a:p>
+            <a:r>
+              <a:t>Nezacházej do Nyquistova teorému. Stačí, že málo vzorků ubere vysoké tóny.</a:t>
             </a:r>
           </a:p>
         </p:txBody>
@@ -753,32 +857,93 @@
           <a:lstStyle/>
           <a:p>
             <a:r>
-              <a:t>Čas: 12–40 minut.</a:t>
-            </a:r>
-          </a:p>
-          <a:p>
-            <a:r>
-              <a:t>Soubory: Laboratoř – vzorkování zvuku.html, Média/, Parametry médií.csv, Zvuk a video.txt</a:t>
-            </a:r>
-          </a:p>
-          <a:p>
-            <a:r>
-              <a:t>12–22 min – modul 05 a poslech zvuků; 8 000 Hz je slyšet okamžitě.</a:t>
-            </a:r>
-          </a:p>
-          <a:p>
-            <a:r>
-              <a:t>22–32 min – videa; upozorni, že při stejné kvalitě nemusí být 10fps soubor menší, protože každý snímek dostane více dat.</a:t>
-            </a:r>
-          </a:p>
-          <a:p>
-            <a:r>
-              <a:t>32–40 min – kontejner vs. kodek, přirovnání ke krabici a způsobu skládání.</a:t>
-            </a:r>
-          </a:p>
-          <a:p>
-            <a:r>
-              <a:t>Výstup: Vyplněné Parametry médií.csv a odpovědi na části A, B a C souboru 06.</a:t>
+              <a:t>Čas: 12–40 minut. Nasazená sluchátka po celou první polovinu.</a:t>
+            </a:r>
+          </a:p>
+          <a:p/>
+          <a:p>
+            <a:r>
+              <a:t>CO ŘEKNEŠ</a:t>
+            </a:r>
+          </a:p>
+          <a:p>
+            <a:r>
+              <a:t>„Nasaďte si sluchátka. Nejdřív laboratoř, modul 05, pak složka Média, tabulku doplňujete průběžně.“</a:t>
+            </a:r>
+          </a:p>
+          <a:p/>
+          <a:p>
+            <a:r>
+              <a:t>12–22 MIN · MODUL 05 A POSLECH</a:t>
+            </a:r>
+          </a:p>
+          <a:p>
+            <a:r>
+              <a:t>V laboratoři mění hustotu vzorků a počet úrovní a sledují, jak se tvar vlny vzdaluje originálu.</a:t>
+            </a:r>
+          </a:p>
+          <a:p>
+            <a:r>
+              <a:t>Pak čtyři zvuky ze složky Média. Pořadí, ve kterém je pustit: 44100/16 bit, 22050/16, 8000/16, 44100/8.</a:t>
+            </a:r>
+          </a:p>
+          <a:p>
+            <a:r>
+              <a:t>8 000 Hz je slyšet okamžitě, zní jako telefon. Zajímavější je dvojice 22050/16 a 44100/8: oba soubory mají shodně 129 kB, tedy přesně polovinu plné kvality, ale zní úplně jinak. První je tlumený, druhý šumí. Ptej se proč — je to celá pointa hodiny.</a:t>
+            </a:r>
+          </a:p>
+          <a:p/>
+          <a:p>
+            <a:r>
+              <a:t>22–32 MIN · VIDEA</a:t>
+            </a:r>
+          </a:p>
+          <a:p>
+            <a:r>
+              <a:t>Čtyři soubory a jedno překvapení: video s 10 snímky za sekundu má 273 kB, tedy VÍC než totéž s 30 snímky (257 kB). Nech je to najít samotné a pak vysvětlit.</a:t>
+            </a:r>
+          </a:p>
+          <a:p>
+            <a:r>
+              <a:t>Vysvětlení: kodek dostal zadanou kvalitu, ne velikost. Když je snímků míň, každý dostane víc dat — a mezi vzdálenějšími snímky se toho navíc změní víc, takže se hůř komprimují.</a:t>
+            </a:r>
+          </a:p>
+          <a:p>
+            <a:r>
+              <a:t>Poloviční rozměry naopak zaberou: 640×360 má 49 kB proti 257 kB. To je pětina, i když pixelů je čtvrtina — ať si všimnou, že to nevyšlo přesně, a zkusí říct proč.</a:t>
+            </a:r>
+          </a:p>
+          <a:p/>
+          <a:p>
+            <a:r>
+              <a:t>32–40 MIN · KONTEJNER A KODEK</a:t>
+            </a:r>
+          </a:p>
+          <a:p>
+            <a:r>
+              <a:t>Přirovnání ke krabici a způsobu skládání. Ať si ho každý napíše vlastními slovy, přesně to po nich bude chtít exit ticket.</a:t>
+            </a:r>
+          </a:p>
+          <a:p/>
+          <a:p>
+            <a:r>
+              <a:t>VÝSTUP</a:t>
+            </a:r>
+          </a:p>
+          <a:p>
+            <a:r>
+              <a:t>Vyplněné Parametry médií.csv a odpovědi na části A, B a C pracovního listu.</a:t>
+            </a:r>
+          </a:p>
+          <a:p/>
+          <a:p>
+            <a:r>
+              <a:t>KDYŽ NENÍ ČAS</a:t>
+            </a:r>
+          </a:p>
+          <a:p>
+            <a:r>
+              <a:t>Vynech animovaný GIF. Zvuk a videa jsou jádro, GIF je jen doplněk.</a:t>
             </a:r>
           </a:p>
         </p:txBody>
@@ -848,27 +1013,40 @@
           <a:lstStyle/>
           <a:p>
             <a:r>
-              <a:t>Průběžná kontrola. Projdi body nahlas, studenti si odškrtávají v sešitu.</a:t>
-            </a:r>
-          </a:p>
-          <a:p>
-            <a:r>
-              <a:t>• Umíš vysvětlit, co je vzorkovací frekvence.</a:t>
-            </a:r>
-          </a:p>
-          <a:p>
-            <a:r>
-              <a:t>• Máš doplněné velikosti u všech souborů v CSV.</a:t>
-            </a:r>
-          </a:p>
-          <a:p>
-            <a:r>
-              <a:t>• Popsal jsi konkrétní místo, kde je u silně komprimovaného videa vidět poškození.</a:t>
-            </a:r>
-          </a:p>
-          <a:p>
-            <a:r>
-              <a:t>• Umíš rozlišit kontejner a kodek a uvést příklad obojího.</a:t>
+              <a:t>Průběžná kontrola, zhruba 38. minuta.</a:t>
+            </a:r>
+          </a:p>
+          <a:p/>
+          <a:p>
+            <a:r>
+              <a:t>CO ŘEKNEŠ</a:t>
+            </a:r>
+          </a:p>
+          <a:p>
+            <a:r>
+              <a:t>„Než odevzdáte, projedeme čtyři věci. Odškrtávejte si je.“ Čti body nahlas a mezi nimi nech pauzu.</a:t>
+            </a:r>
+          </a:p>
+          <a:p/>
+          <a:p>
+            <a:r>
+              <a:t>CO DĚLÁŠ</a:t>
+            </a:r>
+          </a:p>
+          <a:p>
+            <a:r>
+              <a:t>Třetí bod chce konkrétní místo, ne „bylo to rozmazané“. U silně komprimovaného videa se poškození pozná nejlíp na hranách a při rychlém pohybu — obraz se rozpadne do čtverců.</a:t>
+            </a:r>
+          </a:p>
+          <a:p/>
+          <a:p>
+            <a:r>
+              <a:t>POZOR</a:t>
+            </a:r>
+          </a:p>
+          <a:p>
+            <a:r>
+              <a:t>Není to známkování, je to poslední šance práci dodělat.</a:t>
             </a:r>
           </a:p>
         </p:txBody>
@@ -938,27 +1116,60 @@
           <a:lstStyle/>
           <a:p>
             <a:r>
-              <a:t>Společný rozbor – očekávané závěry:</a:t>
-            </a:r>
-          </a:p>
-          <a:p>
-            <a:r>
-              <a:t>Vzorkování: Málo vzorků ztratí vysoké tóny. Málo úrovní přidá šum a zkreslení.</a:t>
-            </a:r>
-          </a:p>
-          <a:p>
-            <a:r>
-              <a:t>Rozlišení videa: Poloviční rozměry znamenají čtvrtinu pixelů a výrazně menší soubor.</a:t>
-            </a:r>
-          </a:p>
-          <a:p>
-            <a:r>
-              <a:t>Snímková frekvence: Ovlivňuje hlavně plynulost. Vliv na velikost závisí na nastavení kvality.</a:t>
-            </a:r>
-          </a:p>
-          <a:p>
-            <a:r>
-              <a:t>Kontejner a kodek: MP4 nebo MKV je obal. H.264 nebo AV1 je způsob komprese obrazu uvnitř.</a:t>
+              <a:t>Společný rozbor, 40–43 minut.</a:t>
+            </a:r>
+          </a:p>
+          <a:p/>
+          <a:p>
+            <a:r>
+              <a:t>CO ŘEKNEŠ</a:t>
+            </a:r>
+          </a:p>
+          <a:p>
+            <a:r>
+              <a:t>Začni tou dvojicí souborů se stejnou velikostí: „22 kHz šestnáct bitů a 44 kHz osm bitů. Oba mají 129 kilobajtů. Proč zní každý jinak?“</a:t>
+            </a:r>
+          </a:p>
+          <a:p>
+            <a:r>
+              <a:t>Odpověď: první ubral, jak často se měří, a přišel o vysoké tóny. Druhý ubral, jak přesně se měří, a přidal šum. Stejný počet bajtů, jiná ztráta.</a:t>
+            </a:r>
+          </a:p>
+          <a:p>
+            <a:r>
+              <a:t>Pak nech studenty vyslovit čtyři závěry ze snímku a doplň jen to, co nezazní.</a:t>
+            </a:r>
+          </a:p>
+          <a:p/>
+          <a:p>
+            <a:r>
+              <a:t>OČEKÁVANÉ ZÁVĚRY</a:t>
+            </a:r>
+          </a:p>
+          <a:p>
+            <a:r>
+              <a:t>Vzorkování: málo vzorků ztratí vysoké tóny, málo úrovní přidá šum a zkreslení.</a:t>
+            </a:r>
+          </a:p>
+          <a:p>
+            <a:r>
+              <a:t>Rozlišení videa: poloviční rozměry znamenají čtvrtinu pixelů a výrazně menší soubor.</a:t>
+            </a:r>
+          </a:p>
+          <a:p>
+            <a:r>
+              <a:t>Snímková frekvence: ovlivňuje hlavně plynulost, vliv na velikost závisí na nastavení kvality.</a:t>
+            </a:r>
+          </a:p>
+          <a:p>
+            <a:r>
+              <a:t>Kontejner a kodek: MP4 nebo MKV je obal, H.264 nebo AV1 je způsob komprese uvnitř.</a:t>
+            </a:r>
+          </a:p>
+          <a:p/>
+          <a:p>
+            <a:r>
+              <a:t>POZOR</a:t>
             </a:r>
           </a:p>
           <a:p>
@@ -1033,17 +1244,45 @@
           <a:lstStyle/>
           <a:p>
             <a:r>
-              <a:t>Exit ticket: Vysvětli vlastními slovy rozdíl mezi kontejnerem a kodekem. Použij přirovnání.</a:t>
-            </a:r>
-          </a:p>
-          <a:p>
-            <a:r>
-              <a:t>Sbírej individuálně. Slouží jako doklad o učení každého studenta.</a:t>
-            </a:r>
-          </a:p>
-          <a:p>
-            <a:r>
-              <a:t>Očekávaná odpověď: Očekává se přirovnání typu krabice a způsob zabalení; kontejner drží stopy pohromadě, kodek určuje, jak jsou data zakódovaná.</a:t>
+              <a:t>Exit ticket, poslední dvě minuty.</a:t>
+            </a:r>
+          </a:p>
+          <a:p/>
+          <a:p>
+            <a:r>
+              <a:t>CO ŘEKNEŠ</a:t>
+            </a:r>
+          </a:p>
+          <a:p>
+            <a:r>
+              <a:t>„Každý sám a s vlastním přirovnáním. Jaký je rozdíl mezi kontejnerem a kodekem?“</a:t>
+            </a:r>
+          </a:p>
+          <a:p/>
+          <a:p>
+            <a:r>
+              <a:t>CO DĚLÁŠ</a:t>
+            </a:r>
+          </a:p>
+          <a:p>
+            <a:r>
+              <a:t>Sbírej u dveří. Přirovnání musí být vlastní — když se ve třídě objeví patnáctkrát krabice a způsob zabalení, příště zadej „jiné přirovnání než krabice“.</a:t>
+            </a:r>
+          </a:p>
+          <a:p/>
+          <a:p>
+            <a:r>
+              <a:t>OČEKÁVANÁ ODPOVĚĎ</a:t>
+            </a:r>
+          </a:p>
+          <a:p>
+            <a:r>
+              <a:t>Kontejner drží stopy pohromadě (obraz, zvuk, titulky), kodek určuje, jak jsou data zakódovaná. Krabice versus způsob, jakým je věc uvnitř složená.</a:t>
+            </a:r>
+          </a:p>
+          <a:p>
+            <a:r>
+              <a:t>Dobrá jsou i přirovnání typu obálka a jazyk dopisu nebo talíř a recept. Špatná je odpověď, kde kodek i kontejner dělají totéž.</a:t>
             </a:r>
           </a:p>
         </p:txBody>
@@ -6477,7 +6716,7 @@
                 </a:solidFill>
                 <a:latin typeface="Calibri"/>
               </a:rPr>
-              <a:t>Vyplněné Parametry médií.csv a odpovědi na části A, B a C souboru 06.</a:t>
+              <a:t>Vyplněné Parametry médií.csv a odpovědi na části A, B a C pracovního listu.</a:t>
             </a:r>
           </a:p>
         </p:txBody>

--- a/public/materialy/1L/6/Prezentace k hodinám/6. Zvuk a video.pptx
+++ b/public/materialy/1L/6/Prezentace k hodinám/6. Zvuk a video.pptx
@@ -513,12 +513,12 @@
           </a:p>
           <a:p>
             <a:r>
-              <a:t>SEŽEŇ SLUCHÁTKA. Bez nich se tahle hodina odučit nedá — rozdíl mezi vzorkovacími frekvencemi ve třídě nikdo neuslyší a devět počítačů hrajících naráz to nespraví.</a:t>
-            </a:r>
-          </a:p>
-          <a:p>
-            <a:r>
-              <a:t>Otevři Laboratoř – vzorkování zvuku.html na projektoru, rozbal Média.zip a rozdej Parametry médií.csv a Zvuk a video.txt.</a:t>
+              <a:t>SEŽEŇ SLUCHÁTKA. Bez nich se tahle hodina odučit nedá — rozdíl mezi vzorkovacími frekvencemi ve třídě nikdo neuslyší a devět počítačů hrajících naráz to nespraví.</a:t>
+            </a:r>
+          </a:p>
+          <a:p>
+            <a:r>
+              <a:t>Otevři Laboratoř – vzorkování zvuku.html na projektoru, rozbal Média.zip a rozdej Parametry médií.csv a Zvuk a video.txt.</a:t>
             </a:r>
           </a:p>
           <a:p>
@@ -534,7 +534,7 @@
           </a:p>
           <a:p>
             <a:r>
-              <a:t>Student vysvětlí vzorkování zvuku, vliv rozlišení a snímkové frekvence u videa a rozliší kontejner od kodeku.</a:t>
+              <a:t>Student vysvětlí vzorkování zvuku, vliv rozlišení a snímkové frekvence u videa a rozliší kontejner od kodeku.</a:t>
             </a:r>
           </a:p>
           <a:p/>
@@ -545,7 +545,7 @@
           </a:p>
           <a:p>
             <a:r>
-              <a:t>Vyplněné Parametry médií.csv a odpovědi na části A, B a C pracovního listu.</a:t>
+              <a:t>Vyplněné Parametry médií.csv a odpovědi na části A, B a C pracovního listu.</a:t>
             </a:r>
           </a:p>
           <a:p/>
@@ -556,7 +556,7 @@
           </a:p>
           <a:p>
             <a:r>
-              <a:t>5 min návrh · 7 min výklad · 28 min práce · 5 min rozbor a exit ticket.</a:t>
+              <a:t>5 min návrh · 7 min výklad · 28 min práce · 5 min rozbor a exit ticket.</a:t>
             </a:r>
           </a:p>
         </p:txBody>
@@ -637,7 +637,7 @@
           </a:p>
           <a:p>
             <a:r>
-              <a:t>„Zvuk je vlna. Plynulá, spojitá, bez skoků. Počítač umí jen čísla. Navrhněte, jak z té vlny udělat čísla — jednou větou, vlastní postup, ne co jste někde slyšeli.“</a:t>
+              <a:t>„Zvuk je vlna. Plynulá, spojitá, bez skoků. Počítač umí jen čísla. Navrhněte, jak z té vlny udělat čísla — jednou větou, vlastní postup, ne co jste někde slyšeli.“</a:t>
             </a:r>
           </a:p>
           <a:p/>
@@ -648,12 +648,12 @@
           </a:p>
           <a:p>
             <a:r>
-              <a:t>Nakresli na tabuli jednu vlnu a nech ji tam. Za deset minut do ní budeš kreslit svislé čárky a bude to celý výklad vzorkování.</a:t>
-            </a:r>
-          </a:p>
-          <a:p>
-            <a:r>
-              <a:t>Ptej se konkrétně: „Kdo napsal, že se to měří v pravidelných intervalech?“ Ten student právě vymyslel vzorkování a řekni mu to.</a:t>
+              <a:t>Nakresli na tabuli jednu vlnu a nech ji tam. Za deset minut do ní budeš kreslit svislé čárky a bude to celý výklad vzorkování.</a:t>
+            </a:r>
+          </a:p>
+          <a:p>
+            <a:r>
+              <a:t>Ptej se konkrétně: „Kdo napsal, že se to měří v pravidelných intervalech?“ Ten student právě vymyslel vzorkování a řekni mu to.</a:t>
             </a:r>
           </a:p>
           <a:p/>
@@ -664,7 +664,7 @@
           </a:p>
           <a:p>
             <a:r>
-              <a:t>Neopravuj nápady, které nevedou nikam. Odpověď „uloží se to jako obrázek té vlny“ je zajímavá a stojí za dvacet vteřin: obrázek vlny by šel, jen by byl obrovský a nešel by přehrát.</a:t>
+              <a:t>Neopravuj nápady, které nevedou nikam. Odpověď „uloží se to jako obrázek té vlny“ je zajímavá a stojí za dvacet vteřin: obrázek vlny by šel, jen by byl obrovský a nešel by přehrát.</a:t>
             </a:r>
           </a:p>
         </p:txBody>
@@ -745,7 +745,7 @@
           </a:p>
           <a:p>
             <a:r>
-              <a:t>K bodu 01: „Vzorkování je měření hlasitosti mnohokrát za sekundu.“ Dělej přitom svislé čárky do vlny na tabuli. „CD měří čtyřicet čtyři tisíc jednou stovkou za sekundu. Když těch čárek uděláte míň, mezi nimi se vlna dopočítá a to, co se do mezery nevešlo, je pryč — a jsou to vysoké tóny.“</a:t>
+              <a:t>K bodu 01: „Vzorkování je měření hlasitosti mnohokrát za sekundu.“ Dělej přitom svislé čárky do vlny na tabuli. „CD měří čtyřicet čtyři tisíc jednou stovkou za sekundu. Když těch čárek uděláte míň, mezi nimi se vlna dopočítá a to, co se do mezery nevešlo, je pryč — a jsou to vysoké tóny.“</a:t>
             </a:r>
           </a:p>
           <a:p>
@@ -755,12 +755,12 @@
           </a:p>
           <a:p>
             <a:r>
-              <a:t>K bodu 02: „U videa je to podobné, jen se místo hlasitosti měří celý obraz. Snímková frekvence je počet obrázků za sekundu a rozhoduje hlavně o plynulosti pohybu.“</a:t>
-            </a:r>
-          </a:p>
-          <a:p>
-            <a:r>
-              <a:t>K bodu 03: „A poslední dvojice, kterou si lidi pletou celý život. MP4 je krabice. H.264 je způsob, jakým jsou věci uvnitř složené. Když soubor nejde přehrát, skoro nikdy za to nemůže krabice — chybí návod, jak rozbalit obsah.“</a:t>
+              <a:t>K bodu 02: „U videa je to podobné, jen se místo hlasitosti měří celý obraz. Snímková frekvence je počet obrázků za sekundu a rozhoduje hlavně o plynulosti pohybu.“</a:t>
+            </a:r>
+          </a:p>
+          <a:p>
+            <a:r>
+              <a:t>K bodu 03: „A poslední dvojice, kterou si lidi pletou celý život. MP4 je krabice. H.264 je způsob, jakým jsou věci uvnitř složené. Když soubor nejde přehrát, skoro nikdy za to nemůže krabice — chybí návod, jak rozbalit obsah.“</a:t>
             </a:r>
           </a:p>
           <a:p>
@@ -776,7 +776,7 @@
           </a:p>
           <a:p>
             <a:r>
-              <a:t>Ověř porozumění: „Ke stažení je stejný film jako .mp4 a jako .mkv. Jde poznat, který půjde přehrát?“ Správně ne, rozhoduje kodek uvnitř.</a:t>
+              <a:t>Ověř porozumění: „Ke stažení je stejný film jako .mp4 a jako .mkv. Jde poznat, který půjde přehrát?“ Správně ne, rozhoduje kodek uvnitř.</a:t>
             </a:r>
           </a:p>
           <a:p/>
@@ -874,12 +874,12 @@
           <a:p/>
           <a:p>
             <a:r>
-              <a:t>12–22 MIN · MODUL 05 A POSLECH</a:t>
-            </a:r>
-          </a:p>
-          <a:p>
-            <a:r>
-              <a:t>V laboratoři mění hustotu vzorků a počet úrovní a sledují, jak se tvar vlny vzdaluje originálu.</a:t>
+              <a:t>12–22 MIN · MODUL 05 A POSLECH</a:t>
+            </a:r>
+          </a:p>
+          <a:p>
+            <a:r>
+              <a:t>V laboratoři mění hustotu vzorků a počet úrovní a sledují, jak se tvar vlny vzdaluje originálu.</a:t>
             </a:r>
           </a:p>
           <a:p>
@@ -889,7 +889,7 @@
           </a:p>
           <a:p>
             <a:r>
-              <a:t>8 000 Hz je slyšet okamžitě, zní jako telefon. Zajímavější je dvojice 22050/16 a 44100/8: oba soubory mají shodně 129 kB, tedy přesně polovinu plné kvality, ale zní úplně jinak. První je tlumený, druhý šumí. Ptej se proč — je to celá pointa hodiny.</a:t>
+              <a:t>8 000 Hz je slyšet okamžitě, zní jako telefon. Zajímavější je dvojice 22050/16 a 44100/8: oba soubory mají shodně 129 kB, tedy přesně polovinu plné kvality, ale zní úplně jinak. První je tlumený, druhý šumí. Ptej se proč — je to celá pointa hodiny.</a:t>
             </a:r>
           </a:p>
           <a:p/>
@@ -900,28 +900,28 @@
           </a:p>
           <a:p>
             <a:r>
-              <a:t>Čtyři soubory a jedno překvapení: video s 10 snímky za sekundu má 273 kB, tedy VÍC než totéž s 30 snímky (257 kB). Nech je to najít samotné a pak vysvětlit.</a:t>
-            </a:r>
-          </a:p>
-          <a:p>
-            <a:r>
-              <a:t>Vysvětlení: kodek dostal zadanou kvalitu, ne velikost. Když je snímků míň, každý dostane víc dat — a mezi vzdálenějšími snímky se toho navíc změní víc, takže se hůř komprimují.</a:t>
-            </a:r>
-          </a:p>
-          <a:p>
-            <a:r>
-              <a:t>Poloviční rozměry naopak zaberou: 640×360 má 49 kB proti 257 kB. To je pětina, i když pixelů je čtvrtina — ať si všimnou, že to nevyšlo přesně, a zkusí říct proč.</a:t>
+              <a:t>Čtyři soubory a jedno překvapení: video s 10 snímky za sekundu má 273 kB, tedy VÍC než totéž s 30 snímky (257 kB). Nech je to najít samotné a pak vysvětlit.</a:t>
+            </a:r>
+          </a:p>
+          <a:p>
+            <a:r>
+              <a:t>Vysvětlení: kodek dostal zadanou kvalitu, ne velikost. Když je snímků míň, každý dostane víc dat — a mezi vzdálenějšími snímky se toho navíc změní víc, takže se hůř komprimují.</a:t>
+            </a:r>
+          </a:p>
+          <a:p>
+            <a:r>
+              <a:t>Poloviční rozměry naopak zaberou: 640×360 má 49 kB proti 257 kB. To je pětina, i když pixelů je čtvrtina — ať si všimnou, že to nevyšlo přesně, a zkusí říct proč.</a:t>
             </a:r>
           </a:p>
           <a:p/>
           <a:p>
             <a:r>
-              <a:t>32–40 MIN · KONTEJNER A KODEK</a:t>
-            </a:r>
-          </a:p>
-          <a:p>
-            <a:r>
-              <a:t>Přirovnání ke krabici a způsobu skládání. Ať si ho každý napíše vlastními slovy, přesně to po nich bude chtít exit ticket.</a:t>
+              <a:t>32–40 MIN · KONTEJNER A KODEK</a:t>
+            </a:r>
+          </a:p>
+          <a:p>
+            <a:r>
+              <a:t>Přirovnání ke krabici a způsobu skládání. Ať si ho každý napíše vlastními slovy, přesně to po nich bude chtít exit ticket.</a:t>
             </a:r>
           </a:p>
           <a:p/>
@@ -932,7 +932,7 @@
           </a:p>
           <a:p>
             <a:r>
-              <a:t>Vyplněné Parametry médií.csv a odpovědi na části A, B a C pracovního listu.</a:t>
+              <a:t>Vyplněné Parametry médií.csv a odpovědi na části A, B a C pracovního listu.</a:t>
             </a:r>
           </a:p>
           <a:p/>
@@ -943,7 +943,7 @@
           </a:p>
           <a:p>
             <a:r>
-              <a:t>Vynech animovaný GIF. Zvuk a videa jsou jádro, GIF je jen doplněk.</a:t>
+              <a:t>Vynech animovaný GIF. Zvuk a videa jsou jádro, GIF je jen doplněk.</a:t>
             </a:r>
           </a:p>
         </p:txBody>
@@ -1024,7 +1024,7 @@
           </a:p>
           <a:p>
             <a:r>
-              <a:t>„Než odevzdáte, projedeme čtyři věci. Odškrtávejte si je.“ Čti body nahlas a mezi nimi nech pauzu.</a:t>
+              <a:t>„Než odevzdáte, projedeme čtyři věci. Odškrtávejte si je.“ Čti body nahlas a mezi nimi nech pauzu.</a:t>
             </a:r>
           </a:p>
           <a:p/>
@@ -1035,7 +1035,7 @@
           </a:p>
           <a:p>
             <a:r>
-              <a:t>Třetí bod chce konkrétní místo, ne „bylo to rozmazané“. U silně komprimovaného videa se poškození pozná nejlíp na hranách a při rychlém pohybu — obraz se rozpadne do čtverců.</a:t>
+              <a:t>Třetí bod chce konkrétní místo, ne „bylo to rozmazané“. U silně komprimovaného videa se poškození pozná nejlíp na hranách a při rychlém pohybu — obraz se rozpadne do čtverců.</a:t>
             </a:r>
           </a:p>
           <a:p/>
@@ -1127,17 +1127,17 @@
           </a:p>
           <a:p>
             <a:r>
-              <a:t>Začni tou dvojicí souborů se stejnou velikostí: „22 kHz šestnáct bitů a 44 kHz osm bitů. Oba mají 129 kilobajtů. Proč zní každý jinak?“</a:t>
-            </a:r>
-          </a:p>
-          <a:p>
-            <a:r>
-              <a:t>Odpověď: první ubral, jak často se měří, a přišel o vysoké tóny. Druhý ubral, jak přesně se měří, a přidal šum. Stejný počet bajtů, jiná ztráta.</a:t>
-            </a:r>
-          </a:p>
-          <a:p>
-            <a:r>
-              <a:t>Pak nech studenty vyslovit čtyři závěry ze snímku a doplň jen to, co nezazní.</a:t>
+              <a:t>Začni tou dvojicí souborů se stejnou velikostí: „22 kHz šestnáct bitů a 44 kHz osm bitů. Oba mají 129 kilobajtů. Proč zní každý jinak?“</a:t>
+            </a:r>
+          </a:p>
+          <a:p>
+            <a:r>
+              <a:t>Odpověď: první ubral, jak často se měří, a přišel o vysoké tóny. Druhý ubral, jak přesně se měří, a přidal šum. Stejný počet bajtů, jiná ztráta.</a:t>
+            </a:r>
+          </a:p>
+          <a:p>
+            <a:r>
+              <a:t>Pak nech studenty vyslovit čtyři závěry ze snímku a doplň jen to, co nezazní.</a:t>
             </a:r>
           </a:p>
           <a:p/>
@@ -1148,12 +1148,12 @@
           </a:p>
           <a:p>
             <a:r>
-              <a:t>Vzorkování: málo vzorků ztratí vysoké tóny, málo úrovní přidá šum a zkreslení.</a:t>
-            </a:r>
-          </a:p>
-          <a:p>
-            <a:r>
-              <a:t>Rozlišení videa: poloviční rozměry znamenají čtvrtinu pixelů a výrazně menší soubor.</a:t>
+              <a:t>Vzorkování: málo vzorků ztratí vysoké tóny, málo úrovní přidá šum a zkreslení.</a:t>
+            </a:r>
+          </a:p>
+          <a:p>
+            <a:r>
+              <a:t>Rozlišení videa: poloviční rozměry znamenají čtvrtinu pixelů a výrazně menší soubor.</a:t>
             </a:r>
           </a:p>
           <a:p>
@@ -1163,7 +1163,7 @@
           </a:p>
           <a:p>
             <a:r>
-              <a:t>Kontejner a kodek: MP4 nebo MKV je obal, H.264 nebo AV1 je způsob komprese uvnitř.</a:t>
+              <a:t>Kontejner a kodek: MP4 nebo MKV je obal, H.264 nebo AV1 je způsob komprese uvnitř.</a:t>
             </a:r>
           </a:p>
           <a:p/>
@@ -1174,7 +1174,7 @@
           </a:p>
           <a:p>
             <a:r>
-              <a:t>Hodnoť postup a zdůvodnění, ne shodu s jednou formulací.</a:t>
+              <a:t>Hodnoť postup a zdůvodnění, ne shodu s jednou formulací.</a:t>
             </a:r>
           </a:p>
         </p:txBody>
@@ -1255,7 +1255,7 @@
           </a:p>
           <a:p>
             <a:r>
-              <a:t>„Každý sám a s vlastním přirovnáním. Jaký je rozdíl mezi kontejnerem a kodekem?“</a:t>
+              <a:t>„Každý sám a s vlastním přirovnáním. Jaký je rozdíl mezi kontejnerem a kodekem?“</a:t>
             </a:r>
           </a:p>
           <a:p/>
@@ -1266,7 +1266,7 @@
           </a:p>
           <a:p>
             <a:r>
-              <a:t>Sbírej u dveří. Přirovnání musí být vlastní — když se ve třídě objeví patnáctkrát krabice a způsob zabalení, příště zadej „jiné přirovnání než krabice“.</a:t>
+              <a:t>Sbírej u dveří. Přirovnání musí být vlastní — když se ve třídě objeví patnáctkrát krabice a způsob zabalení, příště zadej „jiné přirovnání než krabice“.</a:t>
             </a:r>
           </a:p>
           <a:p/>
@@ -1282,7 +1282,7 @@
           </a:p>
           <a:p>
             <a:r>
-              <a:t>Dobrá jsou i přirovnání typu obálka a jazyk dopisu nebo talíř a recept. Špatná je odpověď, kde kodek i kontejner dělají totéž.</a:t>
+              <a:t>Dobrá jsou i přirovnání typu obálka a jazyk dopisu nebo talíř a recept. Špatná je odpověď, kde kodek i kontejner dělají totéž.</a:t>
             </a:r>
           </a:p>
         </p:txBody>
@@ -4480,7 +4480,7 @@
                 </a:solidFill>
                 <a:latin typeface="Calibri"/>
               </a:rPr>
-              <a:t>Základy práce se zvukem a videem</a:t>
+              <a:t>Základy práce se zvukem a videem</a:t>
             </a:r>
           </a:p>
         </p:txBody>
@@ -4519,7 +4519,7 @@
                 </a:solidFill>
                 <a:latin typeface="Calibri"/>
               </a:rPr>
-              <a:t>Student vysvětlí vzorkování zvuku, vliv rozlišení a snímkové frekvence u videa a rozliší kontejner od kodeku.</a:t>
+              <a:t>Student vysvětlí vzorkování zvuku, vliv rozlišení a snímkové frekvence u videa a rozliší kontejner od kodeku.</a:t>
             </a:r>
           </a:p>
         </p:txBody>
@@ -4844,7 +4844,7 @@
                 </a:solidFill>
                 <a:latin typeface="Calibri"/>
               </a:rPr>
-              <a:t>POČÍTAČOVÁ GRAFIKA A PRÁCE S MULTIMÉDII</a:t>
+              <a:t>POČÍTAČOVÁ GRAFIKA A PRÁCE S MULTIMÉDII</a:t>
             </a:r>
           </a:p>
         </p:txBody>
@@ -4918,7 +4918,7 @@
                 </a:solidFill>
                 <a:latin typeface="Calibri"/>
               </a:rPr>
-              <a:t>Zvuk je plynulá vlna. Jak ho počítač uloží, když umí pracovat jen s čísly?</a:t>
+              <a:t>Zvuk je plynulá vlna. Jak ho počítač uloží, když umí pracovat jen s čísly?</a:t>
             </a:r>
           </a:p>
         </p:txBody>
@@ -5140,7 +5140,7 @@
                 </a:solidFill>
                 <a:latin typeface="Calibri"/>
               </a:rPr>
-              <a:t>Kdo navrhl měřit v pravidelných intervalech?</a:t>
+              <a:t>Kdo navrhl měřit v pravidelných intervalech?</a:t>
             </a:r>
           </a:p>
         </p:txBody>
@@ -5386,7 +5386,7 @@
                 </a:solidFill>
                 <a:latin typeface="Calibri"/>
               </a:rPr>
-              <a:t>POČÍTAČOVÁ GRAFIKA A PRÁCE S MULTIMÉDII</a:t>
+              <a:t>POČÍTAČOVÁ GRAFIKA A PRÁCE S MULTIMÉDII</a:t>
             </a:r>
           </a:p>
         </p:txBody>
@@ -5727,7 +5727,7 @@
                 </a:solidFill>
                 <a:latin typeface="Calibri"/>
               </a:rPr>
-              <a:t>Počet obrázků za sekundu u videa. Určuje plynulost pohybu.</a:t>
+              <a:t>Počet obrázků za sekundu u videa. Určuje plynulost pohybu.</a:t>
             </a:r>
           </a:p>
         </p:txBody>
@@ -5841,7 +5841,7 @@
                 </a:solidFill>
                 <a:latin typeface="Calibri"/>
               </a:rPr>
-              <a:t>Kontejner a kodek</a:t>
+              <a:t>Kontejner a kodek</a:t>
             </a:r>
           </a:p>
         </p:txBody>
@@ -6170,7 +6170,7 @@
                 </a:solidFill>
                 <a:latin typeface="Calibri"/>
               </a:rPr>
-              <a:t>POČÍTAČOVÁ GRAFIKA A PRÁCE S MULTIMÉDII</a:t>
+              <a:t>POČÍTAČOVÁ GRAFIKA A PRÁCE S MULTIMÉDII</a:t>
             </a:r>
           </a:p>
         </p:txBody>
@@ -6275,7 +6275,7 @@
                 </a:solidFill>
                 <a:latin typeface="Calibri"/>
               </a:rPr>
-              <a:t>Laboratoř – vzorkování zvuku.html, Média/, Parametry médií.csv, Zvuk a video.txt</a:t>
+              <a:t>Laboratoř – vzorkování zvuku.html, Média/, Parametry médií.csv, Zvuk a video.txt</a:t>
             </a:r>
           </a:p>
         </p:txBody>
@@ -6384,7 +6384,7 @@
                 </a:solidFill>
                 <a:latin typeface="Calibri"/>
               </a:rPr>
-              <a:t>Měň hustotu vzorků a počet úrovní. Sleduj, jak se tvar vlny vzdaluje originálu.</a:t>
+              <a:t>Měň hustotu vzorků a počet úrovní. Sleduj, jak se tvar vlny vzdaluje originálu.</a:t>
             </a:r>
           </a:p>
         </p:txBody>
@@ -6454,7 +6454,7 @@
                 </a:solidFill>
                 <a:latin typeface="Calibri"/>
               </a:rPr>
-              <a:t>Poslech a přehrání</a:t>
+              <a:t>Poslech a přehrání</a:t>
             </a:r>
           </a:p>
         </p:txBody>
@@ -6493,7 +6493,7 @@
                 </a:solidFill>
                 <a:latin typeface="Calibri"/>
               </a:rPr>
-              <a:t>Porovnej čtyři zvuky a čtyři videa ve složce Média.</a:t>
+              <a:t>Porovnej čtyři zvuky a čtyři videa ve složce Média.</a:t>
             </a:r>
           </a:p>
         </p:txBody>
@@ -6602,7 +6602,7 @@
                 </a:solidFill>
                 <a:latin typeface="Calibri"/>
               </a:rPr>
-              <a:t>Zapiš velikosti a svá pozorování do Parametry médií.csv.</a:t>
+              <a:t>Zapiš velikosti a svá pozorování do Parametry médií.csv.</a:t>
             </a:r>
           </a:p>
         </p:txBody>
@@ -6716,7 +6716,7 @@
                 </a:solidFill>
                 <a:latin typeface="Calibri"/>
               </a:rPr>
-              <a:t>Vyplněné Parametry médií.csv a odpovědi na části A, B a C pracovního listu.</a:t>
+              <a:t>Vyplněné Parametry médií.csv a odpovědi na části A, B a C pracovního listu.</a:t>
             </a:r>
           </a:p>
         </p:txBody>
@@ -6927,7 +6927,7 @@
                 </a:solidFill>
                 <a:latin typeface="Calibri"/>
               </a:rPr>
-              <a:t>POČÍTAČOVÁ GRAFIKA A PRÁCE S MULTIMÉDII</a:t>
+              <a:t>POČÍTAČOVÁ GRAFIKA A PRÁCE S MULTIMÉDII</a:t>
             </a:r>
           </a:p>
         </p:txBody>
@@ -7110,7 +7110,7 @@
                 </a:solidFill>
                 <a:latin typeface="Calibri"/>
               </a:rPr>
-              <a:t>Máš doplněné velikosti u všech souborů v CSV.</a:t>
+              <a:t>Máš doplněné velikosti u všech souborů v CSV.</a:t>
             </a:r>
           </a:p>
         </p:txBody>
@@ -7184,7 +7184,7 @@
                 </a:solidFill>
                 <a:latin typeface="Calibri"/>
               </a:rPr>
-              <a:t>Popsal jsi konkrétní místo, kde je u silně komprimovaného videa vidět poškození.</a:t>
+              <a:t>Popsal jsi konkrétní místo, kde je u silně komprimovaného videa vidět poškození.</a:t>
             </a:r>
           </a:p>
         </p:txBody>
@@ -7258,7 +7258,7 @@
                 </a:solidFill>
                 <a:latin typeface="Calibri"/>
               </a:rPr>
-              <a:t>Umíš rozlišit kontejner a kodek a uvést příklad obojího.</a:t>
+              <a:t>Umíš rozlišit kontejner a kodek a uvést příklad obojího.</a:t>
             </a:r>
           </a:p>
         </p:txBody>
@@ -7390,7 +7390,7 @@
                 </a:solidFill>
                 <a:latin typeface="Calibri"/>
               </a:rPr>
-              <a:t>Co si z hodiny odnést</a:t>
+              <a:t>Co si z hodiny odnést</a:t>
             </a:r>
           </a:p>
         </p:txBody>
@@ -7469,7 +7469,7 @@
                 </a:solidFill>
                 <a:latin typeface="Calibri"/>
               </a:rPr>
-              <a:t>POČÍTAČOVÁ GRAFIKA A PRÁCE S MULTIMÉDII</a:t>
+              <a:t>POČÍTAČOVÁ GRAFIKA A PRÁCE S MULTIMÉDII</a:t>
             </a:r>
           </a:p>
         </p:txBody>
@@ -7578,7 +7578,7 @@
                 </a:solidFill>
                 <a:latin typeface="Calibri"/>
               </a:rPr>
-              <a:t>Málo vzorků ztratí vysoké tóny. Málo úrovní přidá šum a zkreslení.</a:t>
+              <a:t>Málo vzorků ztratí vysoké tóny. Málo úrovní přidá šum a zkreslení.</a:t>
             </a:r>
           </a:p>
         </p:txBody>
@@ -7696,7 +7696,7 @@
                 </a:solidFill>
                 <a:latin typeface="Calibri"/>
               </a:rPr>
-              <a:t>Poloviční rozměry znamenají čtvrtinu pixelů a výrazně menší soubor.</a:t>
+              <a:t>Poloviční rozměry znamenají čtvrtinu pixelů a výrazně menší soubor.</a:t>
             </a:r>
           </a:p>
         </p:txBody>
@@ -7893,7 +7893,7 @@
                 </a:solidFill>
                 <a:latin typeface="Calibri"/>
               </a:rPr>
-              <a:t>Kontejner a kodek</a:t>
+              <a:t>Kontejner a kodek</a:t>
             </a:r>
           </a:p>
         </p:txBody>
@@ -8073,7 +8073,7 @@
                 </a:solidFill>
                 <a:latin typeface="Calibri"/>
               </a:rPr>
-              <a:t>POČÍTAČOVÁ GRAFIKA A PRÁCE S MULTIMÉDII</a:t>
+              <a:t>POČÍTAČOVÁ GRAFIKA A PRÁCE S MULTIMÉDII</a:t>
             </a:r>
           </a:p>
         </p:txBody>
@@ -8182,7 +8182,7 @@
                 </a:solidFill>
                 <a:latin typeface="Calibri"/>
               </a:rPr>
-              <a:t>Vysvětli vlastními slovy rozdíl mezi kontejnerem a kodekem. Použij přirovnání.</a:t>
+              <a:t>Vysvětli vlastními slovy rozdíl mezi kontejnerem a kodekem. Použij přirovnání.</a:t>
             </a:r>
           </a:p>
         </p:txBody>
@@ -8296,7 +8296,7 @@
                 </a:solidFill>
                 <a:latin typeface="Calibri"/>
               </a:rPr>
-              <a:t>Očekává se přirovnání typu krabice a způsob zabalení; kontejner drží stopy pohromadě, kodek určuje, jak jsou data zakódovaná.</a:t>
+              <a:t>Očekává se přirovnání typu krabice a způsob zabalení; kontejner drží stopy pohromadě, kodek určuje, jak jsou data zakódovaná.</a:t>
             </a:r>
           </a:p>
         </p:txBody>
